--- a/ML_presentation.pptx
+++ b/ML_presentation.pptx
@@ -1993,7 +1993,7 @@
                 <a:ea typeface="Calibri" pitchFamily="34" charset="-122"/>
                 <a:cs typeface="Calibri" pitchFamily="34" charset="-120"/>
               </a:rPr>
-              <a:t>[XX]% accuracy  ·  9 models trained  ·  Gradient Boosting wins</a:t>
+              <a:t>62,41% F1 Score  ·  9 models trained  ·  Gradient Boosting wins</a:t>
             </a:r>
             <a:endParaRPr lang="en-US" sz="1400" dirty="0"/>
           </a:p>
@@ -11922,24 +11922,30 @@
       </p:sp>
       <p:sp>
         <p:nvSpPr>
-          <p:cNvPr id="24" name="Shape 22"/>
-          <p:cNvSpPr/>
-          <p:nvPr/>
-        </p:nvSpPr>
-        <p:spPr>
-          <a:xfrm>
-            <a:off x="5852160" y="2286000"/>
-            <a:ext cx="2926080" cy="1920240"/>
-          </a:xfrm>
-          <a:prstGeom prst="rect">
-            <a:avLst/>
-          </a:prstGeom>
-          <a:solidFill>
-            <a:srgbClr val="FEF3C7"/>
-          </a:solidFill>
-          <a:ln w="12700">
-            <a:solidFill>
-              <a:srgbClr val="F59E0B"/>
+          <p:cNvPr id="26" name="Shape 24">
+            <a:extLst>
+              <a:ext uri="{FF2B5EF4-FFF2-40B4-BE49-F238E27FC236}">
+                <a16:creationId xmlns:a16="http://schemas.microsoft.com/office/drawing/2014/main" id="{A914B8BB-D96A-4922-D02D-42FBE5EA2A7E}"/>
+              </a:ext>
+            </a:extLst>
+          </p:cNvPr>
+          <p:cNvSpPr/>
+          <p:nvPr/>
+        </p:nvSpPr>
+        <p:spPr>
+          <a:xfrm>
+            <a:off x="5989320" y="2286000"/>
+            <a:ext cx="2564130" cy="1965960"/>
+          </a:xfrm>
+          <a:prstGeom prst="rect">
+            <a:avLst/>
+          </a:prstGeom>
+          <a:solidFill>
+            <a:srgbClr val="FFFFFF"/>
+          </a:solidFill>
+          <a:ln w="12700">
+            <a:solidFill>
+              <a:srgbClr val="C4B5FD"/>
             </a:solidFill>
             <a:prstDash val="solid"/>
           </a:ln>
@@ -11954,14 +11960,20 @@
       </p:sp>
       <p:sp>
         <p:nvSpPr>
-          <p:cNvPr id="25" name="Text 23"/>
-          <p:cNvSpPr/>
-          <p:nvPr/>
-        </p:nvSpPr>
-        <p:spPr>
-          <a:xfrm>
-            <a:off x="5989320" y="2286000"/>
-            <a:ext cx="2743200" cy="1920240"/>
+          <p:cNvPr id="27" name="Text 25">
+            <a:extLst>
+              <a:ext uri="{FF2B5EF4-FFF2-40B4-BE49-F238E27FC236}">
+                <a16:creationId xmlns:a16="http://schemas.microsoft.com/office/drawing/2014/main" id="{5464CCAC-811E-4C44-CAB2-C64AB1331FBB}"/>
+              </a:ext>
+            </a:extLst>
+          </p:cNvPr>
+          <p:cNvSpPr/>
+          <p:nvPr/>
+        </p:nvSpPr>
+        <p:spPr>
+          <a:xfrm>
+            <a:off x="5760720" y="1934464"/>
+            <a:ext cx="3108960" cy="287528"/>
           </a:xfrm>
           <a:prstGeom prst="rect">
             <a:avLst/>
@@ -11973,21 +11985,382 @@
           <a:bodyPr wrap="square" rtlCol="0" anchor="ctr"/>
           <a:lstStyle/>
           <a:p>
-            <a:pPr marL="0" indent="0">
-              <a:buNone/>
-            </a:pPr>
-            <a:r>
-              <a:rPr lang="en-US" sz="1300" b="1" i="1" dirty="0">
-                <a:solidFill>
-                  <a:srgbClr val="92400E"/>
-                </a:solidFill>
-                <a:latin typeface="Calibri" pitchFamily="34" charset="0"/>
-                <a:ea typeface="Calibri" pitchFamily="34" charset="-122"/>
-                <a:cs typeface="Calibri" pitchFamily="34" charset="-120"/>
-              </a:rPr>
-              <a:t>⚠️  TO DO — Add best score and best params after run completes</a:t>
-            </a:r>
-            <a:endParaRPr lang="en-US" sz="1300" dirty="0"/>
+            <a:pPr marL="0" indent="0" algn="ctr">
+              <a:buNone/>
+            </a:pPr>
+            <a:r>
+              <a:rPr lang="en-US" sz="1400" b="1" dirty="0">
+                <a:solidFill>
+                  <a:srgbClr val="1E1B4B"/>
+                </a:solidFill>
+                <a:latin typeface="Calibri" pitchFamily="34" charset="0"/>
+                <a:ea typeface="Calibri" pitchFamily="34" charset="-122"/>
+                <a:cs typeface="Calibri" pitchFamily="34" charset="-120"/>
+              </a:rPr>
+              <a:t>Result</a:t>
+            </a:r>
+            <a:endParaRPr lang="en-US" sz="1400" dirty="0"/>
+          </a:p>
+        </p:txBody>
+      </p:sp>
+      <p:sp>
+        <p:nvSpPr>
+          <p:cNvPr id="28" name="Text 26">
+            <a:extLst>
+              <a:ext uri="{FF2B5EF4-FFF2-40B4-BE49-F238E27FC236}">
+                <a16:creationId xmlns:a16="http://schemas.microsoft.com/office/drawing/2014/main" id="{B1AD1FB4-2FC5-F9BF-5601-F31F6D562C1F}"/>
+              </a:ext>
+            </a:extLst>
+          </p:cNvPr>
+          <p:cNvSpPr/>
+          <p:nvPr/>
+        </p:nvSpPr>
+        <p:spPr>
+          <a:xfrm>
+            <a:off x="5989320" y="2465248"/>
+            <a:ext cx="2564130" cy="568670"/>
+          </a:xfrm>
+          <a:prstGeom prst="rect">
+            <a:avLst/>
+          </a:prstGeom>
+          <a:noFill/>
+          <a:ln/>
+        </p:spPr>
+        <p:txBody>
+          <a:bodyPr wrap="square" rtlCol="0" anchor="ctr"/>
+          <a:lstStyle/>
+          <a:p>
+            <a:pPr marL="0" indent="0" algn="ctr">
+              <a:buNone/>
+            </a:pPr>
+            <a:r>
+              <a:rPr lang="en-US" sz="4600" b="1" dirty="0">
+                <a:solidFill>
+                  <a:srgbClr val="7C3AED"/>
+                </a:solidFill>
+                <a:latin typeface="Calibri" pitchFamily="34" charset="0"/>
+                <a:ea typeface="Calibri" pitchFamily="34" charset="-122"/>
+                <a:cs typeface="Calibri" pitchFamily="34" charset="-120"/>
+              </a:rPr>
+              <a:t>62.4%</a:t>
+            </a:r>
+            <a:endParaRPr lang="en-US" sz="4600" dirty="0"/>
+          </a:p>
+        </p:txBody>
+      </p:sp>
+      <p:sp>
+        <p:nvSpPr>
+          <p:cNvPr id="29" name="Text 27">
+            <a:extLst>
+              <a:ext uri="{FF2B5EF4-FFF2-40B4-BE49-F238E27FC236}">
+                <a16:creationId xmlns:a16="http://schemas.microsoft.com/office/drawing/2014/main" id="{29D0BBD2-C6A3-C26C-B935-2A42C66165A1}"/>
+              </a:ext>
+            </a:extLst>
+          </p:cNvPr>
+          <p:cNvSpPr/>
+          <p:nvPr/>
+        </p:nvSpPr>
+        <p:spPr>
+          <a:xfrm>
+            <a:off x="5917425" y="3134502"/>
+            <a:ext cx="2564130" cy="189557"/>
+          </a:xfrm>
+          <a:prstGeom prst="rect">
+            <a:avLst/>
+          </a:prstGeom>
+          <a:noFill/>
+          <a:ln/>
+        </p:spPr>
+        <p:txBody>
+          <a:bodyPr wrap="square" rtlCol="0" anchor="ctr"/>
+          <a:lstStyle/>
+          <a:p>
+            <a:pPr marL="0" indent="0" algn="ctr">
+              <a:buNone/>
+            </a:pPr>
+            <a:r>
+              <a:rPr lang="en-US" sz="1200" dirty="0">
+                <a:solidFill>
+                  <a:srgbClr val="A78BFA"/>
+                </a:solidFill>
+                <a:latin typeface="Calibri" pitchFamily="34" charset="0"/>
+                <a:ea typeface="Calibri" pitchFamily="34" charset="-122"/>
+                <a:cs typeface="Calibri" pitchFamily="34" charset="-120"/>
+              </a:rPr>
+              <a:t>F1 Score</a:t>
+            </a:r>
+            <a:endParaRPr lang="en-US" sz="1200" dirty="0"/>
+          </a:p>
+        </p:txBody>
+      </p:sp>
+      <p:sp>
+        <p:nvSpPr>
+          <p:cNvPr id="30" name="Shape 28">
+            <a:extLst>
+              <a:ext uri="{FF2B5EF4-FFF2-40B4-BE49-F238E27FC236}">
+                <a16:creationId xmlns:a16="http://schemas.microsoft.com/office/drawing/2014/main" id="{3B3BF91F-BE6F-14A5-2D16-CC7C2262E147}"/>
+              </a:ext>
+            </a:extLst>
+          </p:cNvPr>
+          <p:cNvSpPr/>
+          <p:nvPr/>
+        </p:nvSpPr>
+        <p:spPr>
+          <a:xfrm>
+            <a:off x="6131771" y="3446269"/>
+            <a:ext cx="2279227" cy="46739"/>
+          </a:xfrm>
+          <a:prstGeom prst="rect">
+            <a:avLst/>
+          </a:prstGeom>
+          <a:solidFill>
+            <a:srgbClr val="C4B5FD"/>
+          </a:solidFill>
+          <a:ln w="12700">
+            <a:solidFill>
+              <a:srgbClr val="C4B5FD"/>
+            </a:solidFill>
+            <a:prstDash val="solid"/>
+          </a:ln>
+        </p:spPr>
+      </p:sp>
+      <p:sp>
+        <p:nvSpPr>
+          <p:cNvPr id="31" name="Text 29">
+            <a:extLst>
+              <a:ext uri="{FF2B5EF4-FFF2-40B4-BE49-F238E27FC236}">
+                <a16:creationId xmlns:a16="http://schemas.microsoft.com/office/drawing/2014/main" id="{FF7BCD2C-BF2E-B80F-D41B-DE776F8E2221}"/>
+              </a:ext>
+            </a:extLst>
+          </p:cNvPr>
+          <p:cNvSpPr/>
+          <p:nvPr/>
+        </p:nvSpPr>
+        <p:spPr>
+          <a:xfrm>
+            <a:off x="5989320" y="3566160"/>
+            <a:ext cx="2564130" cy="176919"/>
+          </a:xfrm>
+          <a:prstGeom prst="rect">
+            <a:avLst/>
+          </a:prstGeom>
+          <a:noFill/>
+          <a:ln/>
+        </p:spPr>
+        <p:txBody>
+          <a:bodyPr wrap="square" rtlCol="0" anchor="ctr"/>
+          <a:lstStyle/>
+          <a:p>
+            <a:pPr marL="0" indent="0" algn="ctr">
+              <a:buNone/>
+            </a:pPr>
+            <a:r>
+              <a:rPr lang="en-US" sz="1200" b="1" dirty="0">
+                <a:solidFill>
+                  <a:srgbClr val="1E1B4B"/>
+                </a:solidFill>
+                <a:latin typeface="Calibri" pitchFamily="34" charset="0"/>
+                <a:ea typeface="Calibri" pitchFamily="34" charset="-122"/>
+                <a:cs typeface="Calibri" pitchFamily="34" charset="-120"/>
+              </a:rPr>
+              <a:t>Best params:</a:t>
+            </a:r>
+            <a:endParaRPr lang="en-US" sz="1200" dirty="0"/>
+          </a:p>
+        </p:txBody>
+      </p:sp>
+      <p:sp>
+        <p:nvSpPr>
+          <p:cNvPr id="32" name="Text 30">
+            <a:extLst>
+              <a:ext uri="{FF2B5EF4-FFF2-40B4-BE49-F238E27FC236}">
+                <a16:creationId xmlns:a16="http://schemas.microsoft.com/office/drawing/2014/main" id="{E879DEDC-7AEB-5C09-45C2-75B27C0374F0}"/>
+              </a:ext>
+            </a:extLst>
+          </p:cNvPr>
+          <p:cNvSpPr/>
+          <p:nvPr/>
+        </p:nvSpPr>
+        <p:spPr>
+          <a:xfrm>
+            <a:off x="5989320" y="3901305"/>
+            <a:ext cx="2564130" cy="176919"/>
+          </a:xfrm>
+          <a:prstGeom prst="rect">
+            <a:avLst/>
+          </a:prstGeom>
+          <a:noFill/>
+          <a:ln/>
+        </p:spPr>
+        <p:txBody>
+          <a:bodyPr wrap="square" rtlCol="0" anchor="ctr"/>
+          <a:lstStyle/>
+          <a:p>
+            <a:pPr marL="0" indent="0" algn="ctr">
+              <a:buNone/>
+            </a:pPr>
+            <a:r>
+              <a:rPr lang="en-US" sz="1000" b="1" dirty="0">
+                <a:solidFill>
+                  <a:srgbClr val="1E1B4B"/>
+                </a:solidFill>
+                <a:latin typeface="Calibri" pitchFamily="34" charset="0"/>
+                <a:ea typeface="Calibri" pitchFamily="34" charset="-122"/>
+                <a:cs typeface="Calibri" pitchFamily="34" charset="-120"/>
+              </a:rPr>
+              <a:t>n_estimators: 250  |  max_leaf_nodes: 100  |  max_depth: 10</a:t>
+            </a:r>
+            <a:endParaRPr lang="en-US" sz="1000" dirty="0"/>
+          </a:p>
+        </p:txBody>
+      </p:sp>
+      <p:sp>
+        <p:nvSpPr>
+          <p:cNvPr id="35" name="Shape 64">
+            <a:extLst>
+              <a:ext uri="{FF2B5EF4-FFF2-40B4-BE49-F238E27FC236}">
+                <a16:creationId xmlns:a16="http://schemas.microsoft.com/office/drawing/2014/main" id="{8F71FB0D-4889-B574-6118-A99F0D8AC4B4}"/>
+              </a:ext>
+            </a:extLst>
+          </p:cNvPr>
+          <p:cNvSpPr/>
+          <p:nvPr/>
+        </p:nvSpPr>
+        <p:spPr>
+          <a:xfrm>
+            <a:off x="5989320" y="4401670"/>
+            <a:ext cx="2564130" cy="386038"/>
+          </a:xfrm>
+          <a:prstGeom prst="rect">
+            <a:avLst/>
+          </a:prstGeom>
+          <a:solidFill>
+            <a:srgbClr val="EDE9FE"/>
+          </a:solidFill>
+          <a:ln w="12700">
+            <a:solidFill>
+              <a:srgbClr val="7C3AED"/>
+            </a:solidFill>
+            <a:prstDash val="solid"/>
+          </a:ln>
+        </p:spPr>
+      </p:sp>
+      <p:sp>
+        <p:nvSpPr>
+          <p:cNvPr id="36" name="Text 65">
+            <a:extLst>
+              <a:ext uri="{FF2B5EF4-FFF2-40B4-BE49-F238E27FC236}">
+                <a16:creationId xmlns:a16="http://schemas.microsoft.com/office/drawing/2014/main" id="{86018EDA-59A3-C70B-F531-9EB76A772E43}"/>
+              </a:ext>
+            </a:extLst>
+          </p:cNvPr>
+          <p:cNvSpPr/>
+          <p:nvPr/>
+        </p:nvSpPr>
+        <p:spPr>
+          <a:xfrm>
+            <a:off x="5989320" y="4395582"/>
+            <a:ext cx="2564130" cy="386038"/>
+          </a:xfrm>
+          <a:prstGeom prst="rect">
+            <a:avLst/>
+          </a:prstGeom>
+          <a:noFill/>
+          <a:ln/>
+        </p:spPr>
+        <p:txBody>
+          <a:bodyPr wrap="square" rtlCol="0" anchor="ctr"/>
+          <a:lstStyle/>
+          <a:p>
+            <a:pPr algn="ctr"/>
+            <a:r>
+              <a:rPr lang="en-US" sz="1100" b="1" dirty="0">
+                <a:solidFill>
+                  <a:srgbClr val="7C3AED"/>
+                </a:solidFill>
+                <a:latin typeface="Calibri" pitchFamily="34" charset="0"/>
+                <a:ea typeface="Calibri" pitchFamily="34" charset="-122"/>
+                <a:cs typeface="Calibri" pitchFamily="34" charset="-120"/>
+              </a:rPr>
+              <a:t>F1 improved by +0.01 vs original</a:t>
+            </a:r>
+            <a:endParaRPr lang="en-US" sz="1100" dirty="0"/>
+          </a:p>
+        </p:txBody>
+      </p:sp>
+      <p:sp>
+        <p:nvSpPr>
+          <p:cNvPr id="38" name="Shape 26">
+            <a:extLst>
+              <a:ext uri="{FF2B5EF4-FFF2-40B4-BE49-F238E27FC236}">
+                <a16:creationId xmlns:a16="http://schemas.microsoft.com/office/drawing/2014/main" id="{2B35BE27-09E8-DA62-5F80-F2E75AF44B1B}"/>
+              </a:ext>
+            </a:extLst>
+          </p:cNvPr>
+          <p:cNvSpPr/>
+          <p:nvPr/>
+        </p:nvSpPr>
+        <p:spPr>
+          <a:xfrm>
+            <a:off x="423164" y="4395582"/>
+            <a:ext cx="5029200" cy="411480"/>
+          </a:xfrm>
+          <a:prstGeom prst="rect">
+            <a:avLst/>
+          </a:prstGeom>
+          <a:solidFill>
+            <a:srgbClr val="EDE9FE"/>
+          </a:solidFill>
+          <a:ln w="12700">
+            <a:solidFill>
+              <a:srgbClr val="7C3AED"/>
+            </a:solidFill>
+            <a:prstDash val="solid"/>
+          </a:ln>
+        </p:spPr>
+      </p:sp>
+      <p:sp>
+        <p:nvSpPr>
+          <p:cNvPr id="39" name="Text 27">
+            <a:extLst>
+              <a:ext uri="{FF2B5EF4-FFF2-40B4-BE49-F238E27FC236}">
+                <a16:creationId xmlns:a16="http://schemas.microsoft.com/office/drawing/2014/main" id="{2991D2C9-C857-7DB6-5BBC-DD8573F4F0B1}"/>
+              </a:ext>
+            </a:extLst>
+          </p:cNvPr>
+          <p:cNvSpPr/>
+          <p:nvPr/>
+        </p:nvSpPr>
+        <p:spPr>
+          <a:xfrm>
+            <a:off x="423164" y="4395582"/>
+            <a:ext cx="5029200" cy="411480"/>
+          </a:xfrm>
+          <a:prstGeom prst="rect">
+            <a:avLst/>
+          </a:prstGeom>
+          <a:noFill/>
+          <a:ln/>
+        </p:spPr>
+        <p:txBody>
+          <a:bodyPr wrap="square" rtlCol="0" anchor="ctr"/>
+          <a:lstStyle/>
+          <a:p>
+            <a:pPr marL="0" indent="0" algn="ctr">
+              <a:buNone/>
+            </a:pPr>
+            <a:r>
+              <a:rPr lang="en-US" sz="1100" b="1" dirty="0">
+                <a:solidFill>
+                  <a:srgbClr val="7C3AED"/>
+                </a:solidFill>
+                <a:latin typeface="Calibri" pitchFamily="34" charset="0"/>
+                <a:ea typeface="Calibri" pitchFamily="34" charset="-122"/>
+                <a:cs typeface="Calibri" pitchFamily="34" charset="-120"/>
+              </a:rPr>
+              <a:t>⏱️  Training time: ~109 minutes  ·  Key reason for choosing RandomizedSearch</a:t>
+            </a:r>
+            <a:endParaRPr lang="en-US" sz="1100" dirty="0"/>
           </a:p>
         </p:txBody>
       </p:sp>

--- a/ML_presentation.pptx
+++ b/ML_presentation.pptx
@@ -5,7 +5,7 @@
     <p:sldMasterId id="2147483648" r:id="rId1"/>
   </p:sldMasterIdLst>
   <p:notesMasterIdLst>
-    <p:notesMasterId r:id="rId12"/>
+    <p:notesMasterId r:id="rId13"/>
   </p:notesMasterIdLst>
   <p:sldIdLst>
     <p:sldId id="256" r:id="rId2"/>
@@ -18,6 +18,7 @@
     <p:sldId id="263" r:id="rId9"/>
     <p:sldId id="264" r:id="rId10"/>
     <p:sldId id="265" r:id="rId11"/>
+    <p:sldId id="266" r:id="rId12"/>
   </p:sldIdLst>
   <p:sldSz cx="9144000" cy="5143500" type="screen16x9"/>
   <p:notesSz cx="5143500" cy="9144000"/>
@@ -414,6 +415,114 @@
 </p:notes>
 </file>
 
+<file path=ppt/notesSlides/notesSlide11.xml><?xml version="1.0" encoding="utf-8"?>
+<p:notes xmlns:a="http://schemas.openxmlformats.org/drawingml/2006/main" xmlns:r="http://schemas.openxmlformats.org/officeDocument/2006/relationships" xmlns:p="http://schemas.openxmlformats.org/presentationml/2006/main">
+  <p:cSld>
+    <p:spTree>
+      <p:nvGrpSpPr>
+        <p:cNvPr id="1" name="">
+          <a:extLst>
+            <a:ext uri="{FF2B5EF4-FFF2-40B4-BE49-F238E27FC236}">
+              <a16:creationId xmlns:a16="http://schemas.microsoft.com/office/drawing/2014/main" id="{7C274D05-571D-A084-617A-28A0282012F7}"/>
+            </a:ext>
+          </a:extLst>
+        </p:cNvPr>
+        <p:cNvGrpSpPr/>
+        <p:nvPr/>
+      </p:nvGrpSpPr>
+      <p:grpSpPr>
+        <a:xfrm>
+          <a:off x="0" y="0"/>
+          <a:ext cx="0" cy="0"/>
+          <a:chOff x="0" y="0"/>
+          <a:chExt cx="0" cy="0"/>
+        </a:xfrm>
+      </p:grpSpPr>
+      <p:sp>
+        <p:nvSpPr>
+          <p:cNvPr id="2" name="Slide Image Placeholder 1">
+            <a:extLst>
+              <a:ext uri="{FF2B5EF4-FFF2-40B4-BE49-F238E27FC236}">
+                <a16:creationId xmlns:a16="http://schemas.microsoft.com/office/drawing/2014/main" id="{55DE77CF-B8A6-FAB3-0599-1AEEA82C2D37}"/>
+              </a:ext>
+            </a:extLst>
+          </p:cNvPr>
+          <p:cNvSpPr>
+            <a:spLocks noGrp="1" noRot="1" noChangeAspect="1"/>
+          </p:cNvSpPr>
+          <p:nvPr>
+            <p:ph type="sldImg"/>
+          </p:nvPr>
+        </p:nvSpPr>
+        <p:spPr/>
+      </p:sp>
+      <p:sp>
+        <p:nvSpPr>
+          <p:cNvPr id="3" name="Notes Placeholder 2">
+            <a:extLst>
+              <a:ext uri="{FF2B5EF4-FFF2-40B4-BE49-F238E27FC236}">
+                <a16:creationId xmlns:a16="http://schemas.microsoft.com/office/drawing/2014/main" id="{50D32830-F294-38F1-3112-660BEDB067B5}"/>
+              </a:ext>
+            </a:extLst>
+          </p:cNvPr>
+          <p:cNvSpPr>
+            <a:spLocks noGrp="1"/>
+          </p:cNvSpPr>
+          <p:nvPr>
+            <p:ph type="body" idx="1"/>
+          </p:nvPr>
+        </p:nvSpPr>
+        <p:spPr/>
+        <p:txBody>
+          <a:bodyPr/>
+          <a:lstStyle/>
+          <a:p>
+            <a:endParaRPr lang="en-US" dirty="0"/>
+          </a:p>
+        </p:txBody>
+      </p:sp>
+      <p:sp>
+        <p:nvSpPr>
+          <p:cNvPr id="4" name="Slide Number Placeholder 3">
+            <a:extLst>
+              <a:ext uri="{FF2B5EF4-FFF2-40B4-BE49-F238E27FC236}">
+                <a16:creationId xmlns:a16="http://schemas.microsoft.com/office/drawing/2014/main" id="{E6034634-2366-9DB7-C0BF-B9B620E8894A}"/>
+              </a:ext>
+            </a:extLst>
+          </p:cNvPr>
+          <p:cNvSpPr>
+            <a:spLocks noGrp="1"/>
+          </p:cNvSpPr>
+          <p:nvPr>
+            <p:ph type="sldNum" sz="quarter" idx="10"/>
+          </p:nvPr>
+        </p:nvSpPr>
+        <p:spPr/>
+        <p:txBody>
+          <a:bodyPr/>
+          <a:lstStyle/>
+          <a:p>
+            <a:fld id="{F7021451-1387-4CA6-816F-3879F97B5CBC}" type="slidenum">
+              <a:rPr lang="en-US"/>
+              <a:t>11</a:t>
+            </a:fld>
+            <a:endParaRPr lang="en-US"/>
+          </a:p>
+        </p:txBody>
+      </p:sp>
+    </p:spTree>
+    <p:extLst>
+      <p:ext uri="{BB962C8B-B14F-4D97-AF65-F5344CB8AC3E}">
+        <p14:creationId xmlns:p14="http://schemas.microsoft.com/office/powerpoint/2010/main" val="2418388132"/>
+      </p:ext>
+    </p:extLst>
+  </p:cSld>
+  <p:clrMapOvr>
+    <a:masterClrMapping/>
+  </p:clrMapOvr>
+</p:notes>
+</file>
+
 <file path=ppt/notesSlides/notesSlide2.xml><?xml version="1.0" encoding="utf-8"?>
 <p:notes xmlns:a="http://schemas.openxmlformats.org/drawingml/2006/main" xmlns:r="http://schemas.openxmlformats.org/officeDocument/2006/relationships" xmlns:p="http://schemas.openxmlformats.org/presentationml/2006/main">
   <p:cSld>
@@ -1764,7 +1873,7 @@
 </file>
 
 <file path=ppt/slides/slide10.xml><?xml version="1.0" encoding="utf-8"?>
-<p:sld xmlns:a="http://schemas.openxmlformats.org/drawingml/2006/main" xmlns:r="http://schemas.openxmlformats.org/officeDocument/2006/relationships" xmlns:p="http://schemas.openxmlformats.org/presentationml/2006/main">
+<p:sld xmlns:a="http://schemas.openxmlformats.org/drawingml/2006/main" xmlns:r="http://schemas.openxmlformats.org/officeDocument/2006/relationships" xmlns:p="http://schemas.openxmlformats.org/presentationml/2006/main" show="0">
   <p:cSld name="Slide 10">
     <p:bg>
       <p:bgPr>
@@ -2152,6 +2261,607 @@
         </p:spPr>
       </p:sp>
     </p:spTree>
+  </p:cSld>
+  <p:clrMapOvr>
+    <a:masterClrMapping/>
+  </p:clrMapOvr>
+</p:sld>
+</file>
+
+<file path=ppt/slides/slide11.xml><?xml version="1.0" encoding="utf-8"?>
+<p:sld xmlns:a="http://schemas.openxmlformats.org/drawingml/2006/main" xmlns:r="http://schemas.openxmlformats.org/officeDocument/2006/relationships" xmlns:p="http://schemas.openxmlformats.org/presentationml/2006/main">
+  <p:cSld>
+    <p:bg>
+      <p:bgPr>
+        <a:solidFill>
+          <a:srgbClr val="1E0A3C"/>
+        </a:solidFill>
+        <a:effectLst/>
+      </p:bgPr>
+    </p:bg>
+    <p:spTree>
+      <p:nvGrpSpPr>
+        <p:cNvPr id="1" name="">
+          <a:extLst>
+            <a:ext uri="{FF2B5EF4-FFF2-40B4-BE49-F238E27FC236}">
+              <a16:creationId xmlns:a16="http://schemas.microsoft.com/office/drawing/2014/main" id="{F5270EEB-4B01-2AAA-BEDE-78B993F36448}"/>
+            </a:ext>
+          </a:extLst>
+        </p:cNvPr>
+        <p:cNvGrpSpPr/>
+        <p:nvPr/>
+      </p:nvGrpSpPr>
+      <p:grpSpPr>
+        <a:xfrm>
+          <a:off x="0" y="0"/>
+          <a:ext cx="0" cy="0"/>
+          <a:chOff x="0" y="0"/>
+          <a:chExt cx="0" cy="0"/>
+        </a:xfrm>
+      </p:grpSpPr>
+      <p:sp>
+        <p:nvSpPr>
+          <p:cNvPr id="2" name="Shape 0">
+            <a:extLst>
+              <a:ext uri="{FF2B5EF4-FFF2-40B4-BE49-F238E27FC236}">
+                <a16:creationId xmlns:a16="http://schemas.microsoft.com/office/drawing/2014/main" id="{A0B02BAE-BF41-AE4A-883B-1774958A3504}"/>
+              </a:ext>
+            </a:extLst>
+          </p:cNvPr>
+          <p:cNvSpPr/>
+          <p:nvPr/>
+        </p:nvSpPr>
+        <p:spPr>
+          <a:xfrm>
+            <a:off x="-914400" y="-914400"/>
+            <a:ext cx="3657600" cy="3657600"/>
+          </a:xfrm>
+          <a:prstGeom prst="ellipse">
+            <a:avLst/>
+          </a:prstGeom>
+          <a:solidFill>
+            <a:srgbClr val="4A1A8C">
+              <a:alpha val="35000"/>
+            </a:srgbClr>
+          </a:solidFill>
+          <a:ln w="12700">
+            <a:solidFill>
+              <a:srgbClr val="4A1A8C">
+                <a:alpha val="35000"/>
+              </a:srgbClr>
+            </a:solidFill>
+            <a:prstDash val="solid"/>
+          </a:ln>
+        </p:spPr>
+      </p:sp>
+      <p:sp>
+        <p:nvSpPr>
+          <p:cNvPr id="3" name="Shape 1">
+            <a:extLst>
+              <a:ext uri="{FF2B5EF4-FFF2-40B4-BE49-F238E27FC236}">
+                <a16:creationId xmlns:a16="http://schemas.microsoft.com/office/drawing/2014/main" id="{1ACC7CE7-70D5-555A-4DF1-679EB411400F}"/>
+              </a:ext>
+            </a:extLst>
+          </p:cNvPr>
+          <p:cNvSpPr/>
+          <p:nvPr/>
+        </p:nvSpPr>
+        <p:spPr>
+          <a:xfrm>
+            <a:off x="6858000" y="2560320"/>
+            <a:ext cx="3200400" cy="3200400"/>
+          </a:xfrm>
+          <a:prstGeom prst="ellipse">
+            <a:avLst/>
+          </a:prstGeom>
+          <a:solidFill>
+            <a:srgbClr val="7C3AED">
+              <a:alpha val="30000"/>
+            </a:srgbClr>
+          </a:solidFill>
+          <a:ln w="12700">
+            <a:solidFill>
+              <a:srgbClr val="7C3AED">
+                <a:alpha val="30000"/>
+              </a:srgbClr>
+            </a:solidFill>
+            <a:prstDash val="solid"/>
+          </a:ln>
+        </p:spPr>
+      </p:sp>
+      <p:sp>
+        <p:nvSpPr>
+          <p:cNvPr id="4" name="Text 2">
+            <a:extLst>
+              <a:ext uri="{FF2B5EF4-FFF2-40B4-BE49-F238E27FC236}">
+                <a16:creationId xmlns:a16="http://schemas.microsoft.com/office/drawing/2014/main" id="{F197C6C8-2ABA-41EA-B6AC-49C1EDA68DB6}"/>
+              </a:ext>
+            </a:extLst>
+          </p:cNvPr>
+          <p:cNvSpPr/>
+          <p:nvPr/>
+        </p:nvSpPr>
+        <p:spPr>
+          <a:xfrm>
+            <a:off x="3931920" y="548640"/>
+            <a:ext cx="1097280" cy="1005840"/>
+          </a:xfrm>
+          <a:prstGeom prst="rect">
+            <a:avLst/>
+          </a:prstGeom>
+          <a:noFill/>
+          <a:ln/>
+        </p:spPr>
+        <p:txBody>
+          <a:bodyPr wrap="square" rtlCol="0" anchor="ctr"/>
+          <a:lstStyle/>
+          <a:p>
+            <a:pPr marL="0" indent="0" algn="ctr">
+              <a:buNone/>
+            </a:pPr>
+            <a:endParaRPr lang="en-US" sz="4600" dirty="0"/>
+          </a:p>
+        </p:txBody>
+      </p:sp>
+      <p:sp>
+        <p:nvSpPr>
+          <p:cNvPr id="11" name="Shape 9">
+            <a:extLst>
+              <a:ext uri="{FF2B5EF4-FFF2-40B4-BE49-F238E27FC236}">
+                <a16:creationId xmlns:a16="http://schemas.microsoft.com/office/drawing/2014/main" id="{AF63C01E-54AC-89B6-8F35-B82043717350}"/>
+              </a:ext>
+            </a:extLst>
+          </p:cNvPr>
+          <p:cNvSpPr/>
+          <p:nvPr/>
+        </p:nvSpPr>
+        <p:spPr>
+          <a:xfrm>
+            <a:off x="0" y="5052060"/>
+            <a:ext cx="9144000" cy="91440"/>
+          </a:xfrm>
+          <a:prstGeom prst="rect">
+            <a:avLst/>
+          </a:prstGeom>
+          <a:solidFill>
+            <a:srgbClr val="F59E0B"/>
+          </a:solidFill>
+          <a:ln w="12700">
+            <a:solidFill>
+              <a:srgbClr val="F59E0B"/>
+            </a:solidFill>
+            <a:prstDash val="solid"/>
+          </a:ln>
+        </p:spPr>
+      </p:sp>
+      <p:sp>
+        <p:nvSpPr>
+          <p:cNvPr id="12" name="Text 2">
+            <a:extLst>
+              <a:ext uri="{FF2B5EF4-FFF2-40B4-BE49-F238E27FC236}">
+                <a16:creationId xmlns:a16="http://schemas.microsoft.com/office/drawing/2014/main" id="{04C54D2D-5096-DA58-E84C-582C8CCD1C91}"/>
+              </a:ext>
+            </a:extLst>
+          </p:cNvPr>
+          <p:cNvSpPr/>
+          <p:nvPr/>
+        </p:nvSpPr>
+        <p:spPr>
+          <a:xfrm>
+            <a:off x="457200" y="457200"/>
+            <a:ext cx="914400" cy="914400"/>
+          </a:xfrm>
+          <a:prstGeom prst="rect">
+            <a:avLst/>
+          </a:prstGeom>
+          <a:noFill/>
+          <a:ln/>
+        </p:spPr>
+        <p:txBody>
+          <a:bodyPr wrap="square" rtlCol="0" anchor="ctr"/>
+          <a:lstStyle/>
+          <a:p>
+            <a:pPr marL="0" indent="0" algn="ctr">
+              <a:buNone/>
+            </a:pPr>
+            <a:r>
+              <a:rPr lang="en-US" sz="4000" dirty="0">
+                <a:solidFill>
+                  <a:srgbClr val="000000"/>
+                </a:solidFill>
+              </a:rPr>
+              <a:t>🏨</a:t>
+            </a:r>
+            <a:endParaRPr lang="en-US" sz="4000" dirty="0"/>
+          </a:p>
+        </p:txBody>
+      </p:sp>
+      <p:sp>
+        <p:nvSpPr>
+          <p:cNvPr id="13" name="Text 3">
+            <a:extLst>
+              <a:ext uri="{FF2B5EF4-FFF2-40B4-BE49-F238E27FC236}">
+                <a16:creationId xmlns:a16="http://schemas.microsoft.com/office/drawing/2014/main" id="{46966D82-5050-4477-DE5B-420FC034878B}"/>
+              </a:ext>
+            </a:extLst>
+          </p:cNvPr>
+          <p:cNvSpPr/>
+          <p:nvPr/>
+        </p:nvSpPr>
+        <p:spPr>
+          <a:xfrm>
+            <a:off x="457200" y="1325880"/>
+            <a:ext cx="5943600" cy="594360"/>
+          </a:xfrm>
+          <a:prstGeom prst="rect">
+            <a:avLst/>
+          </a:prstGeom>
+          <a:noFill/>
+          <a:ln/>
+        </p:spPr>
+        <p:txBody>
+          <a:bodyPr wrap="square" rtlCol="0" anchor="ctr"/>
+          <a:lstStyle/>
+          <a:p>
+            <a:pPr marL="0" indent="0">
+              <a:buNone/>
+            </a:pPr>
+            <a:r>
+              <a:rPr lang="en-US" sz="3800" b="1" dirty="0">
+                <a:solidFill>
+                  <a:srgbClr val="FFFFFF"/>
+                </a:solidFill>
+                <a:latin typeface="Calibri" pitchFamily="34" charset="0"/>
+                <a:ea typeface="Calibri" pitchFamily="34" charset="-122"/>
+                <a:cs typeface="Calibri" pitchFamily="34" charset="-120"/>
+              </a:rPr>
+              <a:t>Hotel Booking</a:t>
+            </a:r>
+            <a:endParaRPr lang="en-US" sz="3800" dirty="0"/>
+          </a:p>
+        </p:txBody>
+      </p:sp>
+      <p:sp>
+        <p:nvSpPr>
+          <p:cNvPr id="14" name="Text 4">
+            <a:extLst>
+              <a:ext uri="{FF2B5EF4-FFF2-40B4-BE49-F238E27FC236}">
+                <a16:creationId xmlns:a16="http://schemas.microsoft.com/office/drawing/2014/main" id="{22575B2B-0E1B-4DA8-97A0-49D997BC8D81}"/>
+              </a:ext>
+            </a:extLst>
+          </p:cNvPr>
+          <p:cNvSpPr/>
+          <p:nvPr/>
+        </p:nvSpPr>
+        <p:spPr>
+          <a:xfrm>
+            <a:off x="457200" y="1874520"/>
+            <a:ext cx="5943600" cy="594360"/>
+          </a:xfrm>
+          <a:prstGeom prst="rect">
+            <a:avLst/>
+          </a:prstGeom>
+          <a:noFill/>
+          <a:ln/>
+        </p:spPr>
+        <p:txBody>
+          <a:bodyPr wrap="square" rtlCol="0" anchor="ctr"/>
+          <a:lstStyle/>
+          <a:p>
+            <a:pPr marL="0" indent="0">
+              <a:buNone/>
+            </a:pPr>
+            <a:r>
+              <a:rPr lang="en-US" sz="3800" b="1" dirty="0">
+                <a:solidFill>
+                  <a:srgbClr val="F59E0B"/>
+                </a:solidFill>
+                <a:latin typeface="Calibri" pitchFamily="34" charset="0"/>
+                <a:ea typeface="Calibri" pitchFamily="34" charset="-122"/>
+                <a:cs typeface="Calibri" pitchFamily="34" charset="-120"/>
+              </a:rPr>
+              <a:t>Cancellation Predictor</a:t>
+            </a:r>
+            <a:endParaRPr lang="en-US" sz="3800" dirty="0"/>
+          </a:p>
+        </p:txBody>
+      </p:sp>
+      <p:sp>
+        <p:nvSpPr>
+          <p:cNvPr id="15" name="Text 5">
+            <a:extLst>
+              <a:ext uri="{FF2B5EF4-FFF2-40B4-BE49-F238E27FC236}">
+                <a16:creationId xmlns:a16="http://schemas.microsoft.com/office/drawing/2014/main" id="{5B5535E5-F9C0-A6E5-27D3-11A556B8AADE}"/>
+              </a:ext>
+            </a:extLst>
+          </p:cNvPr>
+          <p:cNvSpPr/>
+          <p:nvPr/>
+        </p:nvSpPr>
+        <p:spPr>
+          <a:xfrm>
+            <a:off x="457200" y="2578608"/>
+            <a:ext cx="5943600" cy="320040"/>
+          </a:xfrm>
+          <a:prstGeom prst="rect">
+            <a:avLst/>
+          </a:prstGeom>
+          <a:noFill/>
+          <a:ln/>
+        </p:spPr>
+        <p:txBody>
+          <a:bodyPr wrap="square" rtlCol="0" anchor="ctr"/>
+          <a:lstStyle/>
+          <a:p>
+            <a:r>
+              <a:rPr lang="en-US" sz="1200" dirty="0">
+                <a:solidFill>
+                  <a:srgbClr val="C4B5FD"/>
+                </a:solidFill>
+                <a:latin typeface="Calibri" pitchFamily="34" charset="0"/>
+                <a:ea typeface="Calibri" pitchFamily="34" charset="-122"/>
+                <a:cs typeface="Calibri" pitchFamily="34" charset="-120"/>
+              </a:rPr>
+              <a:t>62,41% F1 Score </a:t>
+            </a:r>
+            <a:r>
+              <a:rPr lang="en-US" sz="1300" dirty="0">
+                <a:solidFill>
+                  <a:srgbClr val="C4B5FD"/>
+                </a:solidFill>
+                <a:latin typeface="Calibri" pitchFamily="34" charset="0"/>
+                <a:ea typeface="Calibri" pitchFamily="34" charset="-122"/>
+                <a:cs typeface="Calibri" pitchFamily="34" charset="-120"/>
+              </a:rPr>
+              <a:t>|  9 models trained  |  Gradient Boosting wins</a:t>
+            </a:r>
+            <a:endParaRPr lang="en-US" sz="1300" dirty="0"/>
+          </a:p>
+        </p:txBody>
+      </p:sp>
+      <p:sp>
+        <p:nvSpPr>
+          <p:cNvPr id="16" name="Shape 6">
+            <a:extLst>
+              <a:ext uri="{FF2B5EF4-FFF2-40B4-BE49-F238E27FC236}">
+                <a16:creationId xmlns:a16="http://schemas.microsoft.com/office/drawing/2014/main" id="{F37EA28A-068B-F68B-76F0-D53FB5C5CB40}"/>
+              </a:ext>
+            </a:extLst>
+          </p:cNvPr>
+          <p:cNvSpPr/>
+          <p:nvPr/>
+        </p:nvSpPr>
+        <p:spPr>
+          <a:xfrm>
+            <a:off x="457200" y="2999232"/>
+            <a:ext cx="3108960" cy="658368"/>
+          </a:xfrm>
+          <a:prstGeom prst="rect">
+            <a:avLst/>
+          </a:prstGeom>
+          <a:solidFill>
+            <a:srgbClr val="7C3AED"/>
+          </a:solidFill>
+          <a:ln w="12700">
+            <a:solidFill>
+              <a:srgbClr val="7C3AED"/>
+            </a:solidFill>
+            <a:prstDash val="solid"/>
+          </a:ln>
+          <a:effectLst>
+            <a:outerShdw blurRad="127000" dist="38100" dir="8100000" algn="bl" rotWithShape="0">
+              <a:srgbClr val="1E0A3C">
+                <a:alpha val="18000"/>
+              </a:srgbClr>
+            </a:outerShdw>
+          </a:effectLst>
+        </p:spPr>
+      </p:sp>
+      <p:sp>
+        <p:nvSpPr>
+          <p:cNvPr id="17" name="Text 7">
+            <a:extLst>
+              <a:ext uri="{FF2B5EF4-FFF2-40B4-BE49-F238E27FC236}">
+                <a16:creationId xmlns:a16="http://schemas.microsoft.com/office/drawing/2014/main" id="{0122189F-BB4B-9F05-A6EA-D221A4A512EC}"/>
+              </a:ext>
+            </a:extLst>
+          </p:cNvPr>
+          <p:cNvSpPr/>
+          <p:nvPr/>
+        </p:nvSpPr>
+        <p:spPr>
+          <a:xfrm>
+            <a:off x="457200" y="2999232"/>
+            <a:ext cx="3108960" cy="658368"/>
+          </a:xfrm>
+          <a:prstGeom prst="rect">
+            <a:avLst/>
+          </a:prstGeom>
+          <a:noFill/>
+          <a:ln/>
+        </p:spPr>
+        <p:txBody>
+          <a:bodyPr wrap="square" rtlCol="0" anchor="ctr"/>
+          <a:lstStyle/>
+          <a:p>
+            <a:pPr marL="0" indent="0" algn="ctr">
+              <a:buNone/>
+            </a:pPr>
+            <a:r>
+              <a:rPr lang="en-US" sz="1200" b="1" dirty="0">
+                <a:solidFill>
+                  <a:srgbClr val="FFFFFF"/>
+                </a:solidFill>
+                <a:latin typeface="Calibri" pitchFamily="34" charset="0"/>
+                <a:ea typeface="Calibri" pitchFamily="34" charset="-122"/>
+                <a:cs typeface="Calibri" pitchFamily="34" charset="-120"/>
+              </a:rPr>
+              <a:t>Gabriela Cascione</a:t>
+            </a:r>
+            <a:endParaRPr lang="en-US" sz="1200" dirty="0"/>
+          </a:p>
+          <a:p>
+            <a:pPr marL="0" indent="0" algn="ctr">
+              <a:buNone/>
+            </a:pPr>
+            <a:r>
+              <a:rPr lang="en-US" sz="1200" i="1" dirty="0">
+                <a:solidFill>
+                  <a:srgbClr val="FFFFFF"/>
+                </a:solidFill>
+                <a:latin typeface="Calibri" pitchFamily="34" charset="0"/>
+                <a:ea typeface="Calibri" pitchFamily="34" charset="-122"/>
+                <a:cs typeface="Calibri" pitchFamily="34" charset="-120"/>
+              </a:rPr>
+              <a:t>IronHack Data Analytics Bootcamp</a:t>
+            </a:r>
+            <a:endParaRPr lang="en-US" sz="1200" dirty="0"/>
+          </a:p>
+        </p:txBody>
+      </p:sp>
+      <p:sp>
+        <p:nvSpPr>
+          <p:cNvPr id="18" name="Text 8">
+            <a:extLst>
+              <a:ext uri="{FF2B5EF4-FFF2-40B4-BE49-F238E27FC236}">
+                <a16:creationId xmlns:a16="http://schemas.microsoft.com/office/drawing/2014/main" id="{D5BC778D-3C68-7E7C-15F3-195EA5BDF98D}"/>
+              </a:ext>
+            </a:extLst>
+          </p:cNvPr>
+          <p:cNvSpPr/>
+          <p:nvPr/>
+        </p:nvSpPr>
+        <p:spPr>
+          <a:xfrm>
+            <a:off x="457200" y="3822192"/>
+            <a:ext cx="5943600" cy="365760"/>
+          </a:xfrm>
+          <a:prstGeom prst="rect">
+            <a:avLst/>
+          </a:prstGeom>
+          <a:noFill/>
+          <a:ln/>
+        </p:spPr>
+        <p:txBody>
+          <a:bodyPr wrap="square" rtlCol="0" anchor="ctr"/>
+          <a:lstStyle/>
+          <a:p>
+            <a:pPr marL="0" indent="0">
+              <a:buNone/>
+            </a:pPr>
+            <a:r>
+              <a:rPr lang="en-US" sz="1700" b="1" dirty="0">
+                <a:solidFill>
+                  <a:srgbClr val="F59E0B"/>
+                </a:solidFill>
+                <a:latin typeface="Calibri" pitchFamily="34" charset="0"/>
+                <a:ea typeface="Calibri" pitchFamily="34" charset="-122"/>
+                <a:cs typeface="Calibri" pitchFamily="34" charset="-120"/>
+              </a:rPr>
+              <a:t>Thank you  —  Questions welcome!</a:t>
+            </a:r>
+            <a:endParaRPr lang="en-US" sz="1700" dirty="0"/>
+          </a:p>
+        </p:txBody>
+      </p:sp>
+      <p:sp>
+        <p:nvSpPr>
+          <p:cNvPr id="19" name="Text 11">
+            <a:extLst>
+              <a:ext uri="{FF2B5EF4-FFF2-40B4-BE49-F238E27FC236}">
+                <a16:creationId xmlns:a16="http://schemas.microsoft.com/office/drawing/2014/main" id="{D5E3184E-AEA4-25FF-4D39-D5F532E4AB2F}"/>
+              </a:ext>
+            </a:extLst>
+          </p:cNvPr>
+          <p:cNvSpPr/>
+          <p:nvPr/>
+        </p:nvSpPr>
+        <p:spPr>
+          <a:xfrm>
+            <a:off x="6124976" y="3616572"/>
+            <a:ext cx="2468880" cy="347472"/>
+          </a:xfrm>
+          <a:prstGeom prst="rect">
+            <a:avLst/>
+          </a:prstGeom>
+          <a:noFill/>
+          <a:ln/>
+        </p:spPr>
+        <p:txBody>
+          <a:bodyPr wrap="square" rtlCol="0" anchor="ctr"/>
+          <a:lstStyle/>
+          <a:p>
+            <a:pPr marL="0" indent="0" algn="ctr">
+              <a:buNone/>
+            </a:pPr>
+            <a:r>
+              <a:rPr lang="en-US" sz="1100" b="1" i="1" dirty="0">
+                <a:solidFill>
+                  <a:srgbClr val="F59E0B"/>
+                </a:solidFill>
+                <a:latin typeface="Calibri" pitchFamily="34" charset="0"/>
+                <a:ea typeface="Calibri" pitchFamily="34" charset="-122"/>
+                <a:cs typeface="Calibri" pitchFamily="34" charset="-120"/>
+              </a:rPr>
+              <a:t>After 109 minutes of training...</a:t>
+            </a:r>
+            <a:endParaRPr lang="en-US" sz="1100" dirty="0"/>
+          </a:p>
+        </p:txBody>
+      </p:sp>
+      <p:pic>
+        <p:nvPicPr>
+          <p:cNvPr id="1026" name="Picture 2" descr="In the Brexit era, Britain is more Mr Bean than James Bond | Owen Jones |  The Guardian">
+            <a:extLst>
+              <a:ext uri="{FF2B5EF4-FFF2-40B4-BE49-F238E27FC236}">
+                <a16:creationId xmlns:a16="http://schemas.microsoft.com/office/drawing/2014/main" id="{C51A29B2-1F0D-4590-BE08-C7615D8FC077}"/>
+              </a:ext>
+            </a:extLst>
+          </p:cNvPr>
+          <p:cNvPicPr>
+            <a:picLocks noChangeAspect="1" noChangeArrowheads="1"/>
+          </p:cNvPicPr>
+          <p:nvPr/>
+        </p:nvPicPr>
+        <p:blipFill>
+          <a:blip r:embed="rId3">
+            <a:extLst>
+              <a:ext uri="{28A0092B-C50C-407E-A947-70E740481C1C}">
+                <a14:useLocalDpi xmlns:a14="http://schemas.microsoft.com/office/drawing/2010/main" val="0"/>
+              </a:ext>
+            </a:extLst>
+          </a:blip>
+          <a:srcRect/>
+          <a:stretch>
+            <a:fillRect/>
+          </a:stretch>
+        </p:blipFill>
+        <p:spPr bwMode="auto">
+          <a:xfrm>
+            <a:off x="5781775" y="1663726"/>
+            <a:ext cx="3155282" cy="1893169"/>
+          </a:xfrm>
+          <a:prstGeom prst="rect">
+            <a:avLst/>
+          </a:prstGeom>
+          <a:noFill/>
+          <a:extLst>
+            <a:ext uri="{909E8E84-426E-40DD-AFC4-6F175D3DCCD1}">
+              <a14:hiddenFill xmlns:a14="http://schemas.microsoft.com/office/drawing/2010/main">
+                <a:solidFill>
+                  <a:srgbClr val="FFFFFF"/>
+                </a:solidFill>
+              </a14:hiddenFill>
+            </a:ext>
+          </a:extLst>
+        </p:spPr>
+      </p:pic>
+    </p:spTree>
+    <p:extLst>
+      <p:ext uri="{BB962C8B-B14F-4D97-AF65-F5344CB8AC3E}">
+        <p14:creationId xmlns:p14="http://schemas.microsoft.com/office/powerpoint/2010/main" val="1918830078"/>
+      </p:ext>
+    </p:extLst>
   </p:cSld>
   <p:clrMapOvr>
     <a:masterClrMapping/>
@@ -2338,7 +3048,7 @@
         </p:nvSpPr>
         <p:spPr>
           <a:xfrm>
-            <a:off x="274320" y="1188720"/>
+            <a:off x="274320" y="1439369"/>
             <a:ext cx="2560320" cy="1005840"/>
           </a:xfrm>
           <a:prstGeom prst="rect">
@@ -2377,7 +3087,7 @@
         </p:nvSpPr>
         <p:spPr>
           <a:xfrm>
-            <a:off x="274320" y="2194560"/>
+            <a:off x="274320" y="2445209"/>
             <a:ext cx="2560320" cy="640080"/>
           </a:xfrm>
           <a:prstGeom prst="rect">
@@ -2999,6 +3709,51 @@
               <a:t>Binary Classification: Will this booking be cancelled?  (0 = No  /  1 = Yes)</a:t>
             </a:r>
             <a:endParaRPr lang="en-US" sz="1300" dirty="0"/>
+          </a:p>
+        </p:txBody>
+      </p:sp>
+      <p:sp>
+        <p:nvSpPr>
+          <p:cNvPr id="27" name="Text 21">
+            <a:extLst>
+              <a:ext uri="{FF2B5EF4-FFF2-40B4-BE49-F238E27FC236}">
+                <a16:creationId xmlns:a16="http://schemas.microsoft.com/office/drawing/2014/main" id="{8B8D9513-F2CA-6B4C-DA01-33B7E7FF6073}"/>
+              </a:ext>
+            </a:extLst>
+          </p:cNvPr>
+          <p:cNvSpPr/>
+          <p:nvPr/>
+        </p:nvSpPr>
+        <p:spPr>
+          <a:xfrm>
+            <a:off x="8873570" y="4648524"/>
+            <a:ext cx="175099" cy="236674"/>
+          </a:xfrm>
+          <a:prstGeom prst="rect">
+            <a:avLst/>
+          </a:prstGeom>
+          <a:noFill/>
+          <a:ln/>
+        </p:spPr>
+        <p:txBody>
+          <a:bodyPr wrap="square" lIns="0" tIns="0" rIns="0" bIns="0" rtlCol="0" anchor="ctr"/>
+          <a:lstStyle/>
+          <a:p>
+            <a:pPr marL="0" indent="0">
+              <a:buNone/>
+            </a:pPr>
+            <a:r>
+              <a:rPr lang="en-US" sz="1200" dirty="0">
+                <a:solidFill>
+                  <a:srgbClr val="64748B"/>
+                </a:solidFill>
+                <a:latin typeface="Calibri" pitchFamily="34" charset="0"/>
+                <a:ea typeface="Calibri" pitchFamily="34" charset="-122"/>
+                <a:cs typeface="Calibri" pitchFamily="34" charset="-120"/>
+              </a:rPr>
+              <a:t>2</a:t>
+            </a:r>
+            <a:endParaRPr lang="en-US" sz="1200" dirty="0"/>
           </a:p>
         </p:txBody>
       </p:sp>
@@ -3466,7 +4221,7 @@
                 <a:ea typeface="Calibri" pitchFamily="34" charset="-122"/>
                 <a:cs typeface="Calibri" pitchFamily="34" charset="-120"/>
               </a:rPr>
-              <a:t>Kaggle — ahsan81  ·  Similar structure</a:t>
+              <a:t>Kaggle — ahsan81  ·  Similar structure, less rows</a:t>
             </a:r>
             <a:endParaRPr lang="en-US" sz="1100" dirty="0"/>
           </a:p>
@@ -3508,6 +4263,51 @@
               <a:t>Not selected — fewer features, less documentation</a:t>
             </a:r>
             <a:endParaRPr lang="en-US" sz="1100" dirty="0"/>
+          </a:p>
+        </p:txBody>
+      </p:sp>
+      <p:sp>
+        <p:nvSpPr>
+          <p:cNvPr id="16" name="Text 21">
+            <a:extLst>
+              <a:ext uri="{FF2B5EF4-FFF2-40B4-BE49-F238E27FC236}">
+                <a16:creationId xmlns:a16="http://schemas.microsoft.com/office/drawing/2014/main" id="{3B0F326E-805B-CA7F-42C9-7CE53D04C37E}"/>
+              </a:ext>
+            </a:extLst>
+          </p:cNvPr>
+          <p:cNvSpPr/>
+          <p:nvPr/>
+        </p:nvSpPr>
+        <p:spPr>
+          <a:xfrm>
+            <a:off x="8873570" y="4648524"/>
+            <a:ext cx="175099" cy="236674"/>
+          </a:xfrm>
+          <a:prstGeom prst="rect">
+            <a:avLst/>
+          </a:prstGeom>
+          <a:noFill/>
+          <a:ln/>
+        </p:spPr>
+        <p:txBody>
+          <a:bodyPr wrap="square" lIns="0" tIns="0" rIns="0" bIns="0" rtlCol="0" anchor="ctr"/>
+          <a:lstStyle/>
+          <a:p>
+            <a:pPr marL="0" indent="0">
+              <a:buNone/>
+            </a:pPr>
+            <a:r>
+              <a:rPr lang="en-US" sz="1200" dirty="0">
+                <a:solidFill>
+                  <a:srgbClr val="64748B"/>
+                </a:solidFill>
+                <a:latin typeface="Calibri" pitchFamily="34" charset="0"/>
+                <a:ea typeface="Calibri" pitchFamily="34" charset="-122"/>
+                <a:cs typeface="Calibri" pitchFamily="34" charset="-120"/>
+              </a:rPr>
+              <a:t>3</a:t>
+            </a:r>
+            <a:endParaRPr lang="en-US" sz="1200" dirty="0"/>
           </a:p>
         </p:txBody>
       </p:sp>
@@ -4684,6 +5484,51 @@
           </a:p>
         </p:txBody>
       </p:sp>
+      <p:sp>
+        <p:nvSpPr>
+          <p:cNvPr id="35" name="Text 21">
+            <a:extLst>
+              <a:ext uri="{FF2B5EF4-FFF2-40B4-BE49-F238E27FC236}">
+                <a16:creationId xmlns:a16="http://schemas.microsoft.com/office/drawing/2014/main" id="{250AA92C-7828-D366-4E1C-FEB1651988CC}"/>
+              </a:ext>
+            </a:extLst>
+          </p:cNvPr>
+          <p:cNvSpPr/>
+          <p:nvPr/>
+        </p:nvSpPr>
+        <p:spPr>
+          <a:xfrm>
+            <a:off x="8873570" y="4648524"/>
+            <a:ext cx="175099" cy="236674"/>
+          </a:xfrm>
+          <a:prstGeom prst="rect">
+            <a:avLst/>
+          </a:prstGeom>
+          <a:noFill/>
+          <a:ln/>
+        </p:spPr>
+        <p:txBody>
+          <a:bodyPr wrap="square" lIns="0" tIns="0" rIns="0" bIns="0" rtlCol="0" anchor="ctr"/>
+          <a:lstStyle/>
+          <a:p>
+            <a:pPr marL="0" indent="0">
+              <a:buNone/>
+            </a:pPr>
+            <a:r>
+              <a:rPr lang="en-US" sz="1200" dirty="0">
+                <a:solidFill>
+                  <a:srgbClr val="64748B"/>
+                </a:solidFill>
+                <a:latin typeface="Calibri" pitchFamily="34" charset="0"/>
+                <a:ea typeface="Calibri" pitchFamily="34" charset="-122"/>
+                <a:cs typeface="Calibri" pitchFamily="34" charset="-120"/>
+              </a:rPr>
+              <a:t>4</a:t>
+            </a:r>
+            <a:endParaRPr lang="en-US" sz="1200" dirty="0"/>
+          </a:p>
+        </p:txBody>
+      </p:sp>
     </p:spTree>
   </p:cSld>
   <p:clrMapOvr>
@@ -5509,9 +6354,54 @@
                 <a:ea typeface="Calibri" pitchFamily="34" charset="-122"/>
                 <a:cs typeface="Calibri" pitchFamily="34" charset="-120"/>
               </a:rPr>
-              <a:t>All numerical features scaled to zero mean and unit variance — essential for distance-based models like KNN</a:t>
+              <a:t>All numerical features scaled to zero mean and unit variance — essential for distance-based model</a:t>
             </a:r>
             <a:endParaRPr lang="en-US" sz="1100" dirty="0"/>
+          </a:p>
+        </p:txBody>
+      </p:sp>
+      <p:sp>
+        <p:nvSpPr>
+          <p:cNvPr id="26" name="Text 21">
+            <a:extLst>
+              <a:ext uri="{FF2B5EF4-FFF2-40B4-BE49-F238E27FC236}">
+                <a16:creationId xmlns:a16="http://schemas.microsoft.com/office/drawing/2014/main" id="{68981F05-E225-A16C-FE50-87CA54CF988B}"/>
+              </a:ext>
+            </a:extLst>
+          </p:cNvPr>
+          <p:cNvSpPr/>
+          <p:nvPr/>
+        </p:nvSpPr>
+        <p:spPr>
+          <a:xfrm>
+            <a:off x="8873570" y="4648524"/>
+            <a:ext cx="175099" cy="236674"/>
+          </a:xfrm>
+          <a:prstGeom prst="rect">
+            <a:avLst/>
+          </a:prstGeom>
+          <a:noFill/>
+          <a:ln/>
+        </p:spPr>
+        <p:txBody>
+          <a:bodyPr wrap="square" lIns="0" tIns="0" rIns="0" bIns="0" rtlCol="0" anchor="ctr"/>
+          <a:lstStyle/>
+          <a:p>
+            <a:pPr marL="0" indent="0">
+              <a:buNone/>
+            </a:pPr>
+            <a:r>
+              <a:rPr lang="en-US" sz="1200" dirty="0">
+                <a:solidFill>
+                  <a:srgbClr val="64748B"/>
+                </a:solidFill>
+                <a:latin typeface="Calibri" pitchFamily="34" charset="0"/>
+                <a:ea typeface="Calibri" pitchFamily="34" charset="-122"/>
+                <a:cs typeface="Calibri" pitchFamily="34" charset="-120"/>
+              </a:rPr>
+              <a:t>5</a:t>
+            </a:r>
+            <a:endParaRPr lang="en-US" sz="1200" dirty="0"/>
           </a:p>
         </p:txBody>
       </p:sp>
@@ -8908,6 +9798,51 @@
           </a:p>
         </p:txBody>
       </p:sp>
+      <p:sp>
+        <p:nvSpPr>
+          <p:cNvPr id="27" name="Text 21">
+            <a:extLst>
+              <a:ext uri="{FF2B5EF4-FFF2-40B4-BE49-F238E27FC236}">
+                <a16:creationId xmlns:a16="http://schemas.microsoft.com/office/drawing/2014/main" id="{99789029-89CA-E6EB-44A2-209235202110}"/>
+              </a:ext>
+            </a:extLst>
+          </p:cNvPr>
+          <p:cNvSpPr/>
+          <p:nvPr/>
+        </p:nvSpPr>
+        <p:spPr>
+          <a:xfrm>
+            <a:off x="8873570" y="4648524"/>
+            <a:ext cx="175099" cy="236674"/>
+          </a:xfrm>
+          <a:prstGeom prst="rect">
+            <a:avLst/>
+          </a:prstGeom>
+          <a:noFill/>
+          <a:ln/>
+        </p:spPr>
+        <p:txBody>
+          <a:bodyPr wrap="square" lIns="0" tIns="0" rIns="0" bIns="0" rtlCol="0" anchor="ctr"/>
+          <a:lstStyle/>
+          <a:p>
+            <a:pPr marL="0" indent="0">
+              <a:buNone/>
+            </a:pPr>
+            <a:r>
+              <a:rPr lang="en-US" sz="1200" dirty="0">
+                <a:solidFill>
+                  <a:srgbClr val="64748B"/>
+                </a:solidFill>
+                <a:latin typeface="Calibri" pitchFamily="34" charset="0"/>
+                <a:ea typeface="Calibri" pitchFamily="34" charset="-122"/>
+                <a:cs typeface="Calibri" pitchFamily="34" charset="-120"/>
+              </a:rPr>
+              <a:t>6</a:t>
+            </a:r>
+            <a:endParaRPr lang="en-US" sz="1200" dirty="0"/>
+          </a:p>
+        </p:txBody>
+      </p:sp>
     </p:spTree>
   </p:cSld>
   <p:clrMapOvr>
@@ -9088,7 +10023,7 @@
                 <a:ea typeface="Calibri" pitchFamily="34" charset="-122"/>
                 <a:cs typeface="Calibri" pitchFamily="34" charset="-120"/>
               </a:rPr>
-              <a:t>Feature importances from Gradient Boosting — features with importance &lt; 0.01 were dropped</a:t>
+              <a:t>Feature importances from top model: Gradient Boosting — features with importance &lt; 0.01 were dropped</a:t>
             </a:r>
             <a:endParaRPr lang="en-US" sz="1200" dirty="0"/>
           </a:p>
@@ -11138,6 +12073,51 @@
               <a:t>After dropping 6 low-importance features, model was retrained. Accuracy and F1 both dropped slightly — confirming the original full feature set was optimal.</a:t>
             </a:r>
             <a:endParaRPr lang="en-US" sz="1000" dirty="0"/>
+          </a:p>
+        </p:txBody>
+      </p:sp>
+      <p:sp>
+        <p:nvSpPr>
+          <p:cNvPr id="13" name="Text 21">
+            <a:extLst>
+              <a:ext uri="{FF2B5EF4-FFF2-40B4-BE49-F238E27FC236}">
+                <a16:creationId xmlns:a16="http://schemas.microsoft.com/office/drawing/2014/main" id="{B098D0B4-70CF-038D-196F-1B1F2A1E314A}"/>
+              </a:ext>
+            </a:extLst>
+          </p:cNvPr>
+          <p:cNvSpPr/>
+          <p:nvPr/>
+        </p:nvSpPr>
+        <p:spPr>
+          <a:xfrm>
+            <a:off x="8873570" y="4648524"/>
+            <a:ext cx="175099" cy="236674"/>
+          </a:xfrm>
+          <a:prstGeom prst="rect">
+            <a:avLst/>
+          </a:prstGeom>
+          <a:noFill/>
+          <a:ln/>
+        </p:spPr>
+        <p:txBody>
+          <a:bodyPr wrap="square" lIns="0" tIns="0" rIns="0" bIns="0" rtlCol="0" anchor="ctr"/>
+          <a:lstStyle/>
+          <a:p>
+            <a:pPr marL="0" indent="0">
+              <a:buNone/>
+            </a:pPr>
+            <a:r>
+              <a:rPr lang="en-US" sz="1200" dirty="0">
+                <a:solidFill>
+                  <a:srgbClr val="64748B"/>
+                </a:solidFill>
+                <a:latin typeface="Calibri" pitchFamily="34" charset="0"/>
+                <a:ea typeface="Calibri" pitchFamily="34" charset="-122"/>
+                <a:cs typeface="Calibri" pitchFamily="34" charset="-120"/>
+              </a:rPr>
+              <a:t>7</a:t>
+            </a:r>
+            <a:endParaRPr lang="en-US" sz="1200" dirty="0"/>
           </a:p>
         </p:txBody>
       </p:sp>
@@ -11367,7 +12347,7 @@
         </p:nvSpPr>
         <p:spPr>
           <a:xfrm>
-            <a:off x="274320" y="1755648"/>
+            <a:off x="274320" y="1641348"/>
             <a:ext cx="8595360" cy="365760"/>
           </a:xfrm>
           <a:prstGeom prst="rect">
@@ -11384,6 +12364,17 @@
               <a:buNone/>
             </a:pPr>
             <a:r>
+              <a:rPr lang="en-US" sz="1200" i="1" dirty="0" err="1">
+                <a:solidFill>
+                  <a:srgbClr val="64748B"/>
+                </a:solidFill>
+                <a:latin typeface="Calibri" pitchFamily="34" charset="0"/>
+                <a:ea typeface="Calibri" pitchFamily="34" charset="-122"/>
+                <a:cs typeface="Calibri" pitchFamily="34" charset="-120"/>
+              </a:rPr>
+              <a:t>RandomizedSearch</a:t>
+            </a:r>
+            <a:r>
               <a:rPr lang="en-US" sz="1200" i="1" dirty="0">
                 <a:solidFill>
                   <a:srgbClr val="64748B"/>
@@ -11392,7 +12383,7 @@
                 <a:ea typeface="Calibri" pitchFamily="34" charset="-122"/>
                 <a:cs typeface="Calibri" pitchFamily="34" charset="-120"/>
               </a:rPr>
-              <a:t>Why RandomizedSearch over GridSearch? Full grid would take too long — RandomizedSearch tries 10 random combinations, balancing speed and coverage</a:t>
+              <a:t> tries 10 random combinations, balancing speed and coverage</a:t>
             </a:r>
             <a:endParaRPr lang="en-US" sz="1200" dirty="0"/>
           </a:p>
@@ -11406,7 +12397,7 @@
         </p:nvSpPr>
         <p:spPr>
           <a:xfrm>
-            <a:off x="274320" y="2286000"/>
+            <a:off x="274320" y="2135124"/>
             <a:ext cx="5303520" cy="594360"/>
           </a:xfrm>
           <a:prstGeom prst="rect">
@@ -11438,7 +12429,7 @@
         </p:nvSpPr>
         <p:spPr>
           <a:xfrm>
-            <a:off x="274320" y="2286000"/>
+            <a:off x="274320" y="2135124"/>
             <a:ext cx="64008" cy="594360"/>
           </a:xfrm>
           <a:prstGeom prst="rect">
@@ -11463,7 +12454,7 @@
         </p:nvSpPr>
         <p:spPr>
           <a:xfrm>
-            <a:off x="502920" y="2350008"/>
+            <a:off x="502920" y="2199132"/>
             <a:ext cx="2743200" cy="237744"/>
           </a:xfrm>
           <a:prstGeom prst="rect">
@@ -11502,7 +12493,7 @@
         </p:nvSpPr>
         <p:spPr>
           <a:xfrm>
-            <a:off x="3291840" y="2350008"/>
+            <a:off x="3291840" y="2199132"/>
             <a:ext cx="2148840" cy="237744"/>
           </a:xfrm>
           <a:prstGeom prst="rect">
@@ -11541,7 +12532,7 @@
         </p:nvSpPr>
         <p:spPr>
           <a:xfrm>
-            <a:off x="502920" y="2606040"/>
+            <a:off x="502920" y="2455164"/>
             <a:ext cx="4846320" cy="201168"/>
           </a:xfrm>
           <a:prstGeom prst="rect">
@@ -11580,7 +12571,7 @@
         </p:nvSpPr>
         <p:spPr>
           <a:xfrm>
-            <a:off x="274320" y="2971800"/>
+            <a:off x="274320" y="2820924"/>
             <a:ext cx="5303520" cy="594360"/>
           </a:xfrm>
           <a:prstGeom prst="rect">
@@ -11612,7 +12603,7 @@
         </p:nvSpPr>
         <p:spPr>
           <a:xfrm>
-            <a:off x="274320" y="2971800"/>
+            <a:off x="274320" y="2820924"/>
             <a:ext cx="64008" cy="594360"/>
           </a:xfrm>
           <a:prstGeom prst="rect">
@@ -11637,7 +12628,7 @@
         </p:nvSpPr>
         <p:spPr>
           <a:xfrm>
-            <a:off x="502920" y="3035808"/>
+            <a:off x="502920" y="2884932"/>
             <a:ext cx="2743200" cy="237744"/>
           </a:xfrm>
           <a:prstGeom prst="rect">
@@ -11676,7 +12667,7 @@
         </p:nvSpPr>
         <p:spPr>
           <a:xfrm>
-            <a:off x="3291840" y="3035808"/>
+            <a:off x="3291840" y="2884932"/>
             <a:ext cx="2148840" cy="237744"/>
           </a:xfrm>
           <a:prstGeom prst="rect">
@@ -11715,7 +12706,7 @@
         </p:nvSpPr>
         <p:spPr>
           <a:xfrm>
-            <a:off x="502920" y="3291840"/>
+            <a:off x="502920" y="3140964"/>
             <a:ext cx="4846320" cy="201168"/>
           </a:xfrm>
           <a:prstGeom prst="rect">
@@ -11754,7 +12745,7 @@
         </p:nvSpPr>
         <p:spPr>
           <a:xfrm>
-            <a:off x="274320" y="3657600"/>
+            <a:off x="274320" y="3506724"/>
             <a:ext cx="5303520" cy="594360"/>
           </a:xfrm>
           <a:prstGeom prst="rect">
@@ -11786,7 +12777,7 @@
         </p:nvSpPr>
         <p:spPr>
           <a:xfrm>
-            <a:off x="274320" y="3657600"/>
+            <a:off x="274320" y="3506724"/>
             <a:ext cx="64008" cy="594360"/>
           </a:xfrm>
           <a:prstGeom prst="rect">
@@ -11811,7 +12802,7 @@
         </p:nvSpPr>
         <p:spPr>
           <a:xfrm>
-            <a:off x="502920" y="3721608"/>
+            <a:off x="502920" y="3570732"/>
             <a:ext cx="2743200" cy="237744"/>
           </a:xfrm>
           <a:prstGeom prst="rect">
@@ -11850,7 +12841,7 @@
         </p:nvSpPr>
         <p:spPr>
           <a:xfrm>
-            <a:off x="3291840" y="3721608"/>
+            <a:off x="3291840" y="3570732"/>
             <a:ext cx="2148840" cy="237744"/>
           </a:xfrm>
           <a:prstGeom prst="rect">
@@ -11889,7 +12880,7 @@
         </p:nvSpPr>
         <p:spPr>
           <a:xfrm>
-            <a:off x="502920" y="3977640"/>
+            <a:off x="502920" y="3826764"/>
             <a:ext cx="4846320" cy="201168"/>
           </a:xfrm>
           <a:prstGeom prst="rect">
@@ -11934,7 +12925,7 @@
         </p:nvSpPr>
         <p:spPr>
           <a:xfrm>
-            <a:off x="5989320" y="2286000"/>
+            <a:off x="5989320" y="2135124"/>
             <a:ext cx="2564130" cy="1965960"/>
           </a:xfrm>
           <a:prstGeom prst="rect">
@@ -11972,7 +12963,7 @@
         </p:nvSpPr>
         <p:spPr>
           <a:xfrm>
-            <a:off x="5760720" y="1934464"/>
+            <a:off x="5760720" y="1825330"/>
             <a:ext cx="3108960" cy="287528"/>
           </a:xfrm>
           <a:prstGeom prst="rect">
@@ -12017,7 +13008,7 @@
         </p:nvSpPr>
         <p:spPr>
           <a:xfrm>
-            <a:off x="5989320" y="2465248"/>
+            <a:off x="5989320" y="2314372"/>
             <a:ext cx="2564130" cy="568670"/>
           </a:xfrm>
           <a:prstGeom prst="rect">
@@ -12062,7 +13053,7 @@
         </p:nvSpPr>
         <p:spPr>
           <a:xfrm>
-            <a:off x="5917425" y="3134502"/>
+            <a:off x="5917425" y="2983626"/>
             <a:ext cx="2564130" cy="189557"/>
           </a:xfrm>
           <a:prstGeom prst="rect">
@@ -12107,7 +13098,7 @@
         </p:nvSpPr>
         <p:spPr>
           <a:xfrm>
-            <a:off x="6131771" y="3446269"/>
+            <a:off x="6131771" y="3295393"/>
             <a:ext cx="2279227" cy="46739"/>
           </a:xfrm>
           <a:prstGeom prst="rect">
@@ -12138,7 +13129,7 @@
         </p:nvSpPr>
         <p:spPr>
           <a:xfrm>
-            <a:off x="5989320" y="3566160"/>
+            <a:off x="5989320" y="3415284"/>
             <a:ext cx="2564130" cy="176919"/>
           </a:xfrm>
           <a:prstGeom prst="rect">
@@ -12183,7 +13174,7 @@
         </p:nvSpPr>
         <p:spPr>
           <a:xfrm>
-            <a:off x="5989320" y="3901305"/>
+            <a:off x="5989320" y="3750429"/>
             <a:ext cx="2564130" cy="176919"/>
           </a:xfrm>
           <a:prstGeom prst="rect">
@@ -12228,7 +13219,7 @@
         </p:nvSpPr>
         <p:spPr>
           <a:xfrm>
-            <a:off x="5989320" y="4401670"/>
+            <a:off x="5989320" y="4250794"/>
             <a:ext cx="2564130" cy="386038"/>
           </a:xfrm>
           <a:prstGeom prst="rect">
@@ -12259,7 +13250,7 @@
         </p:nvSpPr>
         <p:spPr>
           <a:xfrm>
-            <a:off x="5989320" y="4395582"/>
+            <a:off x="5989320" y="4244706"/>
             <a:ext cx="2564130" cy="386038"/>
           </a:xfrm>
           <a:prstGeom prst="rect">
@@ -12302,7 +13293,7 @@
         </p:nvSpPr>
         <p:spPr>
           <a:xfrm>
-            <a:off x="423164" y="4395582"/>
+            <a:off x="423164" y="4244706"/>
             <a:ext cx="5029200" cy="411480"/>
           </a:xfrm>
           <a:prstGeom prst="rect">
@@ -12333,7 +13324,7 @@
         </p:nvSpPr>
         <p:spPr>
           <a:xfrm>
-            <a:off x="423164" y="4395582"/>
+            <a:off x="423164" y="4244706"/>
             <a:ext cx="5029200" cy="411480"/>
           </a:xfrm>
           <a:prstGeom prst="rect">
@@ -12361,6 +13352,51 @@
               <a:t>⏱️  Training time: ~109 minutes  ·  Key reason for choosing RandomizedSearch</a:t>
             </a:r>
             <a:endParaRPr lang="en-US" sz="1100" dirty="0"/>
+          </a:p>
+        </p:txBody>
+      </p:sp>
+      <p:sp>
+        <p:nvSpPr>
+          <p:cNvPr id="24" name="Text 21">
+            <a:extLst>
+              <a:ext uri="{FF2B5EF4-FFF2-40B4-BE49-F238E27FC236}">
+                <a16:creationId xmlns:a16="http://schemas.microsoft.com/office/drawing/2014/main" id="{4D46DF72-3807-A58B-CDD3-585F1F6B8193}"/>
+              </a:ext>
+            </a:extLst>
+          </p:cNvPr>
+          <p:cNvSpPr/>
+          <p:nvPr/>
+        </p:nvSpPr>
+        <p:spPr>
+          <a:xfrm>
+            <a:off x="8873570" y="4648524"/>
+            <a:ext cx="175099" cy="236674"/>
+          </a:xfrm>
+          <a:prstGeom prst="rect">
+            <a:avLst/>
+          </a:prstGeom>
+          <a:noFill/>
+          <a:ln/>
+        </p:spPr>
+        <p:txBody>
+          <a:bodyPr wrap="square" lIns="0" tIns="0" rIns="0" bIns="0" rtlCol="0" anchor="ctr"/>
+          <a:lstStyle/>
+          <a:p>
+            <a:pPr marL="0" indent="0">
+              <a:buNone/>
+            </a:pPr>
+            <a:r>
+              <a:rPr lang="en-US" sz="1200" dirty="0">
+                <a:solidFill>
+                  <a:srgbClr val="64748B"/>
+                </a:solidFill>
+                <a:latin typeface="Calibri" pitchFamily="34" charset="0"/>
+                <a:ea typeface="Calibri" pitchFamily="34" charset="-122"/>
+                <a:cs typeface="Calibri" pitchFamily="34" charset="-120"/>
+              </a:rPr>
+              <a:t>8</a:t>
+            </a:r>
+            <a:endParaRPr lang="en-US" sz="1200" dirty="0"/>
           </a:p>
         </p:txBody>
       </p:sp>
@@ -13606,9 +14642,54 @@
                 <a:ea typeface="Calibri" pitchFamily="34" charset="-122"/>
                 <a:cs typeface="Calibri" pitchFamily="34" charset="-120"/>
               </a:rPr>
-              <a:t>More powerful gradient boosting variants not explored this week. Likely to push accuracy above 81%</a:t>
+              <a:t>More powerful gradient boosting variants that were not explored this week</a:t>
             </a:r>
             <a:endParaRPr lang="en-US" sz="1000" dirty="0"/>
+          </a:p>
+        </p:txBody>
+      </p:sp>
+      <p:sp>
+        <p:nvSpPr>
+          <p:cNvPr id="38" name="Text 21">
+            <a:extLst>
+              <a:ext uri="{FF2B5EF4-FFF2-40B4-BE49-F238E27FC236}">
+                <a16:creationId xmlns:a16="http://schemas.microsoft.com/office/drawing/2014/main" id="{C32B0C55-1736-AAED-3A0A-29F85419A565}"/>
+              </a:ext>
+            </a:extLst>
+          </p:cNvPr>
+          <p:cNvSpPr/>
+          <p:nvPr/>
+        </p:nvSpPr>
+        <p:spPr>
+          <a:xfrm>
+            <a:off x="8873570" y="4648524"/>
+            <a:ext cx="175099" cy="236674"/>
+          </a:xfrm>
+          <a:prstGeom prst="rect">
+            <a:avLst/>
+          </a:prstGeom>
+          <a:noFill/>
+          <a:ln/>
+        </p:spPr>
+        <p:txBody>
+          <a:bodyPr wrap="square" lIns="0" tIns="0" rIns="0" bIns="0" rtlCol="0" anchor="ctr"/>
+          <a:lstStyle/>
+          <a:p>
+            <a:pPr marL="0" indent="0">
+              <a:buNone/>
+            </a:pPr>
+            <a:r>
+              <a:rPr lang="en-US" sz="1200" dirty="0">
+                <a:solidFill>
+                  <a:srgbClr val="64748B"/>
+                </a:solidFill>
+                <a:latin typeface="Calibri" pitchFamily="34" charset="0"/>
+                <a:ea typeface="Calibri" pitchFamily="34" charset="-122"/>
+                <a:cs typeface="Calibri" pitchFamily="34" charset="-120"/>
+              </a:rPr>
+              <a:t>9</a:t>
+            </a:r>
+            <a:endParaRPr lang="en-US" sz="1200" dirty="0"/>
           </a:p>
         </p:txBody>
       </p:sp>
